--- a/s02/descargables/S02_ALU_01_Presentacion.pptx
+++ b/s02/descargables/S02_ALU_01_Presentacion.pptx
@@ -4017,6 +4017,10 @@
             <a:prstDash val="solid"/>
           </a:ln>
         </p:spPr>
+        <p:txBody>
+          <a:bodyPr/>
+          <a:p/>
+        </p:txBody>
       </p:sp>
       <p:sp>
         <p:nvSpPr>
@@ -4083,6 +4087,10 @@
             <a:prstDash val="solid"/>
           </a:ln>
         </p:spPr>
+        <p:txBody>
+          <a:bodyPr/>
+          <a:p/>
+        </p:txBody>
       </p:sp>
       <p:sp>
         <p:nvSpPr>
@@ -4149,6 +4157,10 @@
             <a:prstDash val="solid"/>
           </a:ln>
         </p:spPr>
+        <p:txBody>
+          <a:bodyPr/>
+          <a:p/>
+        </p:txBody>
       </p:sp>
       <p:sp>
         <p:nvSpPr>
@@ -4215,6 +4227,10 @@
             <a:prstDash val="solid"/>
           </a:ln>
         </p:spPr>
+        <p:txBody>
+          <a:bodyPr/>
+          <a:p/>
+        </p:txBody>
       </p:sp>
       <p:sp>
         <p:nvSpPr>
@@ -4281,6 +4297,10 @@
             <a:prstDash val="solid"/>
           </a:ln>
         </p:spPr>
+        <p:txBody>
+          <a:bodyPr/>
+          <a:p/>
+        </p:txBody>
       </p:sp>
       <p:sp>
         <p:nvSpPr>
@@ -4347,6 +4367,10 @@
             <a:prstDash val="solid"/>
           </a:ln>
         </p:spPr>
+        <p:txBody>
+          <a:bodyPr/>
+          <a:p/>
+        </p:txBody>
       </p:sp>
       <p:sp>
         <p:nvSpPr>
@@ -4413,6 +4437,10 @@
             <a:prstDash val="solid"/>
           </a:ln>
         </p:spPr>
+        <p:txBody>
+          <a:bodyPr/>
+          <a:p/>
+        </p:txBody>
       </p:sp>
       <p:sp>
         <p:nvSpPr>
@@ -4479,6 +4507,10 @@
             <a:prstDash val="solid"/>
           </a:ln>
         </p:spPr>
+        <p:txBody>
+          <a:bodyPr/>
+          <a:p/>
+        </p:txBody>
       </p:sp>
       <p:sp>
         <p:nvSpPr>
@@ -4648,6 +4680,10 @@
             <a:prstDash val="solid"/>
           </a:ln>
         </p:spPr>
+        <p:txBody>
+          <a:bodyPr/>
+          <a:p/>
+        </p:txBody>
       </p:sp>
       <p:sp>
         <p:nvSpPr>
@@ -4673,6 +4709,10 @@
             <a:prstDash val="solid"/>
           </a:ln>
         </p:spPr>
+        <p:txBody>
+          <a:bodyPr/>
+          <a:p/>
+        </p:txBody>
       </p:sp>
       <p:sp>
         <p:nvSpPr>
@@ -4895,6 +4935,10 @@
             <a:prstDash val="solid"/>
           </a:ln>
         </p:spPr>
+        <p:txBody>
+          <a:bodyPr/>
+          <a:p/>
+        </p:txBody>
       </p:sp>
       <p:sp>
         <p:nvSpPr>
@@ -4920,6 +4964,10 @@
             <a:prstDash val="solid"/>
           </a:ln>
         </p:spPr>
+        <p:txBody>
+          <a:bodyPr/>
+          <a:p/>
+        </p:txBody>
       </p:sp>
       <p:sp>
         <p:nvSpPr>
@@ -5142,6 +5190,10 @@
             <a:prstDash val="solid"/>
           </a:ln>
         </p:spPr>
+        <p:txBody>
+          <a:bodyPr/>
+          <a:p/>
+        </p:txBody>
       </p:sp>
       <p:sp>
         <p:nvSpPr>
@@ -5167,6 +5219,10 @@
             <a:prstDash val="solid"/>
           </a:ln>
         </p:spPr>
+        <p:txBody>
+          <a:bodyPr/>
+          <a:p/>
+        </p:txBody>
       </p:sp>
       <p:sp>
         <p:nvSpPr>
@@ -5389,6 +5445,10 @@
             <a:prstDash val="solid"/>
           </a:ln>
         </p:spPr>
+        <p:txBody>
+          <a:bodyPr/>
+          <a:p/>
+        </p:txBody>
       </p:sp>
       <p:sp>
         <p:nvSpPr>
@@ -5414,6 +5474,10 @@
             <a:prstDash val="solid"/>
           </a:ln>
         </p:spPr>
+        <p:txBody>
+          <a:bodyPr/>
+          <a:p/>
+        </p:txBody>
       </p:sp>
       <p:sp>
         <p:nvSpPr>
@@ -5597,6 +5661,10 @@
             <a:prstDash val="solid"/>
           </a:ln>
         </p:spPr>
+        <p:txBody>
+          <a:bodyPr/>
+          <a:p/>
+        </p:txBody>
       </p:sp>
       <p:sp>
         <p:nvSpPr>
@@ -5688,6 +5756,10 @@
             <a:prstDash val="solid"/>
           </a:ln>
         </p:spPr>
+        <p:txBody>
+          <a:bodyPr/>
+          <a:p/>
+        </p:txBody>
       </p:sp>
       <p:sp>
         <p:nvSpPr>
@@ -5832,6 +5904,10 @@
             <a:prstDash val="solid"/>
           </a:ln>
         </p:spPr>
+        <p:txBody>
+          <a:bodyPr/>
+          <a:p/>
+        </p:txBody>
       </p:sp>
       <p:sp>
         <p:nvSpPr>
@@ -5859,6 +5935,10 @@
             <a:prstDash val="solid"/>
           </a:ln>
         </p:spPr>
+        <p:txBody>
+          <a:bodyPr/>
+          <a:p/>
+        </p:txBody>
       </p:sp>
       <p:sp>
         <p:nvSpPr>
@@ -6081,6 +6161,10 @@
             <a:prstDash val="solid"/>
           </a:ln>
         </p:spPr>
+        <p:txBody>
+          <a:bodyPr/>
+          <a:p/>
+        </p:txBody>
       </p:sp>
       <p:sp>
         <p:nvSpPr>
@@ -6108,6 +6192,10 @@
             <a:prstDash val="solid"/>
           </a:ln>
         </p:spPr>
+        <p:txBody>
+          <a:bodyPr/>
+          <a:p/>
+        </p:txBody>
       </p:sp>
       <p:sp>
         <p:nvSpPr>
@@ -6330,6 +6418,10 @@
             <a:prstDash val="solid"/>
           </a:ln>
         </p:spPr>
+        <p:txBody>
+          <a:bodyPr/>
+          <a:p/>
+        </p:txBody>
       </p:sp>
       <p:sp>
         <p:nvSpPr>
@@ -6357,6 +6449,10 @@
             <a:prstDash val="solid"/>
           </a:ln>
         </p:spPr>
+        <p:txBody>
+          <a:bodyPr/>
+          <a:p/>
+        </p:txBody>
       </p:sp>
       <p:sp>
         <p:nvSpPr>
@@ -6579,6 +6675,10 @@
             <a:prstDash val="solid"/>
           </a:ln>
         </p:spPr>
+        <p:txBody>
+          <a:bodyPr/>
+          <a:p/>
+        </p:txBody>
       </p:sp>
       <p:sp>
         <p:nvSpPr>
@@ -6606,6 +6706,10 @@
             <a:prstDash val="solid"/>
           </a:ln>
         </p:spPr>
+        <p:txBody>
+          <a:bodyPr/>
+          <a:p/>
+        </p:txBody>
       </p:sp>
       <p:sp>
         <p:nvSpPr>
@@ -6828,6 +6932,10 @@
             <a:prstDash val="solid"/>
           </a:ln>
         </p:spPr>
+        <p:txBody>
+          <a:bodyPr/>
+          <a:p/>
+        </p:txBody>
       </p:sp>
       <p:sp>
         <p:nvSpPr>
@@ -6894,6 +7002,10 @@
             <a:prstDash val="solid"/>
           </a:ln>
         </p:spPr>
+        <p:txBody>
+          <a:bodyPr/>
+          <a:p/>
+        </p:txBody>
       </p:sp>
       <p:sp>
         <p:nvSpPr>
@@ -7091,6 +7203,10 @@
             <a:prstDash val="solid"/>
           </a:ln>
         </p:spPr>
+        <p:txBody>
+          <a:bodyPr/>
+          <a:p/>
+        </p:txBody>
       </p:sp>
       <p:sp>
         <p:nvSpPr>
@@ -7302,6 +7418,10 @@
             <a:prstDash val="solid"/>
           </a:ln>
         </p:spPr>
+        <p:txBody>
+          <a:bodyPr/>
+          <a:p/>
+        </p:txBody>
       </p:sp>
       <p:sp>
         <p:nvSpPr>
@@ -7513,6 +7633,10 @@
             <a:prstDash val="solid"/>
           </a:ln>
         </p:spPr>
+        <p:txBody>
+          <a:bodyPr/>
+          <a:p/>
+        </p:txBody>
       </p:sp>
       <p:sp>
         <p:nvSpPr>
@@ -7682,6 +7806,10 @@
             <a:prstDash val="solid"/>
           </a:ln>
         </p:spPr>
+        <p:txBody>
+          <a:bodyPr/>
+          <a:p/>
+        </p:txBody>
       </p:sp>
       <p:sp>
         <p:nvSpPr>
@@ -7865,6 +7993,10 @@
             <a:prstDash val="solid"/>
           </a:ln>
         </p:spPr>
+        <p:txBody>
+          <a:bodyPr/>
+          <a:p/>
+        </p:txBody>
       </p:sp>
       <p:sp>
         <p:nvSpPr>
@@ -8048,6 +8180,10 @@
             <a:prstDash val="solid"/>
           </a:ln>
         </p:spPr>
+        <p:txBody>
+          <a:bodyPr/>
+          <a:p/>
+        </p:txBody>
       </p:sp>
       <p:sp>
         <p:nvSpPr>
@@ -8231,6 +8367,10 @@
             <a:prstDash val="solid"/>
           </a:ln>
         </p:spPr>
+        <p:txBody>
+          <a:bodyPr/>
+          <a:p/>
+        </p:txBody>
       </p:sp>
       <p:sp>
         <p:nvSpPr>
@@ -8556,6 +8696,10 @@
             <a:prstDash val="solid"/>
           </a:ln>
         </p:spPr>
+        <p:txBody>
+          <a:bodyPr/>
+          <a:p/>
+        </p:txBody>
       </p:sp>
       <p:sp>
         <p:nvSpPr>
@@ -8625,6 +8769,10 @@
             <a:prstDash val="solid"/>
           </a:ln>
         </p:spPr>
+        <p:txBody>
+          <a:bodyPr/>
+          <a:p/>
+        </p:txBody>
       </p:sp>
       <p:sp>
         <p:nvSpPr>
@@ -8691,6 +8839,10 @@
             <a:prstDash val="solid"/>
           </a:ln>
         </p:spPr>
+        <p:txBody>
+          <a:bodyPr/>
+          <a:p/>
+        </p:txBody>
       </p:sp>
       <p:sp>
         <p:nvSpPr>
@@ -8757,6 +8909,10 @@
             <a:prstDash val="solid"/>
           </a:ln>
         </p:spPr>
+        <p:txBody>
+          <a:bodyPr/>
+          <a:p/>
+        </p:txBody>
       </p:sp>
       <p:sp>
         <p:nvSpPr>
@@ -8823,6 +8979,10 @@
             <a:prstDash val="solid"/>
           </a:ln>
         </p:spPr>
+        <p:txBody>
+          <a:bodyPr/>
+          <a:p/>
+        </p:txBody>
       </p:sp>
       <p:sp>
         <p:nvSpPr>
@@ -8889,6 +9049,10 @@
             <a:prstDash val="solid"/>
           </a:ln>
         </p:spPr>
+        <p:txBody>
+          <a:bodyPr/>
+          <a:p/>
+        </p:txBody>
       </p:sp>
       <p:sp>
         <p:nvSpPr>
@@ -8955,6 +9119,10 @@
             <a:prstDash val="solid"/>
           </a:ln>
         </p:spPr>
+        <p:txBody>
+          <a:bodyPr/>
+          <a:p/>
+        </p:txBody>
       </p:sp>
       <p:sp>
         <p:nvSpPr>
@@ -9021,6 +9189,10 @@
             <a:prstDash val="solid"/>
           </a:ln>
         </p:spPr>
+        <p:txBody>
+          <a:bodyPr/>
+          <a:p/>
+        </p:txBody>
       </p:sp>
       <p:sp>
         <p:nvSpPr>
@@ -9126,6 +9298,10 @@
             <a:prstDash val="solid"/>
           </a:ln>
         </p:spPr>
+        <p:txBody>
+          <a:bodyPr/>
+          <a:p/>
+        </p:txBody>
       </p:sp>
       <p:sp>
         <p:nvSpPr>
@@ -9231,6 +9407,10 @@
             <a:prstDash val="solid"/>
           </a:ln>
         </p:spPr>
+        <p:txBody>
+          <a:bodyPr/>
+          <a:p/>
+        </p:txBody>
       </p:sp>
       <p:sp>
         <p:nvSpPr>
@@ -9265,7 +9445,7 @@
                 <a:ea typeface="Arial" pitchFamily="34" charset="-122"/>
                 <a:cs typeface="Arial" pitchFamily="34" charset="-120"/>
               </a:rPr>
-              <a:t>Dice «para cada uno de los elementos». Son dos indicadores mínimos por elemento, ocho en total. En la matriz vienen bloqueados: no admiten «No aplica».</a:t>
+              <a:t>Dice «para cada uno de los elementos». El mínimo son dos por elemento, ocho en total. Esta matriz bloquea diez, repartidos 2 · 3 · 3 · 2: los dos de más son criterio de la herramienta.</a:t>
             </a:r>
             <a:endParaRPr lang="en-US" sz="1150" dirty="0"/>
           </a:p>
@@ -9400,6 +9580,10 @@
             <a:prstDash val="solid"/>
           </a:ln>
         </p:spPr>
+        <p:txBody>
+          <a:bodyPr/>
+          <a:p/>
+        </p:txBody>
       </p:sp>
       <p:sp>
         <p:nvSpPr>
@@ -9544,6 +9728,10 @@
             <a:prstDash val="solid"/>
           </a:ln>
         </p:spPr>
+        <p:txBody>
+          <a:bodyPr/>
+          <a:p/>
+        </p:txBody>
       </p:sp>
       <p:sp>
         <p:nvSpPr>
@@ -9688,6 +9876,10 @@
             <a:prstDash val="solid"/>
           </a:ln>
         </p:spPr>
+        <p:txBody>
+          <a:bodyPr/>
+          <a:p/>
+        </p:txBody>
       </p:sp>
       <p:sp>
         <p:nvSpPr>
@@ -9754,6 +9946,10 @@
             <a:prstDash val="solid"/>
           </a:ln>
         </p:spPr>
+        <p:txBody>
+          <a:bodyPr/>
+          <a:p/>
+        </p:txBody>
       </p:sp>
       <p:sp>
         <p:nvSpPr>
@@ -9820,6 +10016,10 @@
             <a:prstDash val="solid"/>
           </a:ln>
         </p:spPr>
+        <p:txBody>
+          <a:bodyPr/>
+          <a:p/>
+        </p:txBody>
       </p:sp>
       <p:sp>
         <p:nvSpPr>
@@ -9996,6 +10196,10 @@
             <a:prstDash val="solid"/>
           </a:ln>
         </p:spPr>
+        <p:txBody>
+          <a:bodyPr/>
+          <a:p/>
+        </p:txBody>
       </p:sp>
       <p:sp>
         <p:nvSpPr>
@@ -10179,6 +10383,10 @@
             <a:prstDash val="solid"/>
           </a:ln>
         </p:spPr>
+        <p:txBody>
+          <a:bodyPr/>
+          <a:p/>
+        </p:txBody>
       </p:sp>
       <p:sp>
         <p:nvSpPr>
@@ -10362,6 +10570,10 @@
             <a:prstDash val="solid"/>
           </a:ln>
         </p:spPr>
+        <p:txBody>
+          <a:bodyPr/>
+          <a:p/>
+        </p:txBody>
       </p:sp>
       <p:sp>
         <p:nvSpPr>
@@ -10453,6 +10665,10 @@
             <a:prstDash val="solid"/>
           </a:ln>
         </p:spPr>
+        <p:txBody>
+          <a:bodyPr/>
+          <a:p/>
+        </p:txBody>
       </p:sp>
       <p:sp>
         <p:nvSpPr>
@@ -10597,6 +10813,10 @@
             <a:prstDash val="solid"/>
           </a:ln>
         </p:spPr>
+        <p:txBody>
+          <a:bodyPr/>
+          <a:p/>
+        </p:txBody>
       </p:sp>
       <p:sp>
         <p:nvSpPr>
@@ -10741,6 +10961,10 @@
             <a:prstDash val="solid"/>
           </a:ln>
         </p:spPr>
+        <p:txBody>
+          <a:bodyPr/>
+          <a:p/>
+        </p:txBody>
       </p:sp>
       <p:sp>
         <p:nvSpPr>
@@ -10885,6 +11109,10 @@
             <a:prstDash val="solid"/>
           </a:ln>
         </p:spPr>
+        <p:txBody>
+          <a:bodyPr/>
+          <a:p/>
+        </p:txBody>
       </p:sp>
       <p:sp>
         <p:nvSpPr>
@@ -11082,6 +11310,10 @@
             <a:prstDash val="solid"/>
           </a:ln>
         </p:spPr>
+        <p:txBody>
+          <a:bodyPr/>
+          <a:p/>
+        </p:txBody>
       </p:sp>
       <p:sp>
         <p:nvSpPr>
@@ -11109,6 +11341,10 @@
             <a:prstDash val="solid"/>
           </a:ln>
         </p:spPr>
+        <p:txBody>
+          <a:bodyPr/>
+          <a:p/>
+        </p:txBody>
       </p:sp>
       <p:sp>
         <p:nvSpPr>
@@ -11214,6 +11450,10 @@
             <a:prstDash val="solid"/>
           </a:ln>
         </p:spPr>
+        <p:txBody>
+          <a:bodyPr/>
+          <a:p/>
+        </p:txBody>
       </p:sp>
       <p:sp>
         <p:nvSpPr>
@@ -11241,6 +11481,10 @@
             <a:prstDash val="solid"/>
           </a:ln>
         </p:spPr>
+        <p:txBody>
+          <a:bodyPr/>
+          <a:p/>
+        </p:txBody>
       </p:sp>
       <p:sp>
         <p:nvSpPr>
@@ -11346,6 +11590,10 @@
             <a:prstDash val="solid"/>
           </a:ln>
         </p:spPr>
+        <p:txBody>
+          <a:bodyPr/>
+          <a:p/>
+        </p:txBody>
       </p:sp>
       <p:sp>
         <p:nvSpPr>
@@ -11373,6 +11621,10 @@
             <a:prstDash val="solid"/>
           </a:ln>
         </p:spPr>
+        <p:txBody>
+          <a:bodyPr/>
+          <a:p/>
+        </p:txBody>
       </p:sp>
       <p:sp>
         <p:nvSpPr>
@@ -11478,6 +11730,10 @@
             <a:prstDash val="solid"/>
           </a:ln>
         </p:spPr>
+        <p:txBody>
+          <a:bodyPr/>
+          <a:p/>
+        </p:txBody>
       </p:sp>
       <p:sp>
         <p:nvSpPr>
@@ -11505,6 +11761,10 @@
             <a:prstDash val="solid"/>
           </a:ln>
         </p:spPr>
+        <p:txBody>
+          <a:bodyPr/>
+          <a:p/>
+        </p:txBody>
       </p:sp>
       <p:sp>
         <p:nvSpPr>
@@ -11610,6 +11870,10 @@
             <a:prstDash val="solid"/>
           </a:ln>
         </p:spPr>
+        <p:txBody>
+          <a:bodyPr/>
+          <a:p/>
+        </p:txBody>
       </p:sp>
       <p:sp>
         <p:nvSpPr>
@@ -11637,6 +11901,10 @@
             <a:prstDash val="solid"/>
           </a:ln>
         </p:spPr>
+        <p:txBody>
+          <a:bodyPr/>
+          <a:p/>
+        </p:txBody>
       </p:sp>
       <p:sp>
         <p:nvSpPr>
@@ -11781,6 +12049,10 @@
             <a:prstDash val="solid"/>
           </a:ln>
         </p:spPr>
+        <p:txBody>
+          <a:bodyPr/>
+          <a:p/>
+        </p:txBody>
       </p:sp>
       <p:sp>
         <p:nvSpPr>
@@ -11886,6 +12158,10 @@
             <a:prstDash val="solid"/>
           </a:ln>
         </p:spPr>
+        <p:txBody>
+          <a:bodyPr/>
+          <a:p/>
+        </p:txBody>
       </p:sp>
       <p:sp>
         <p:nvSpPr>
@@ -11991,6 +12267,10 @@
             <a:prstDash val="solid"/>
           </a:ln>
         </p:spPr>
+        <p:txBody>
+          <a:bodyPr/>
+          <a:p/>
+        </p:txBody>
       </p:sp>
       <p:sp>
         <p:nvSpPr>
@@ -12096,6 +12376,10 @@
             <a:prstDash val="solid"/>
           </a:ln>
         </p:spPr>
+        <p:txBody>
+          <a:bodyPr/>
+          <a:p/>
+        </p:txBody>
       </p:sp>
       <p:sp>
         <p:nvSpPr>
@@ -12162,6 +12446,10 @@
             <a:prstDash val="solid"/>
           </a:ln>
         </p:spPr>
+        <p:txBody>
+          <a:bodyPr/>
+          <a:p/>
+        </p:txBody>
       </p:sp>
       <p:sp>
         <p:nvSpPr>
@@ -12331,6 +12619,10 @@
             <a:prstDash val="solid"/>
           </a:ln>
         </p:spPr>
+        <p:txBody>
+          <a:bodyPr/>
+          <a:p/>
+        </p:txBody>
       </p:sp>
       <p:sp>
         <p:nvSpPr>
@@ -12400,6 +12692,10 @@
             <a:prstDash val="solid"/>
           </a:ln>
         </p:spPr>
+        <p:txBody>
+          <a:bodyPr/>
+          <a:p/>
+        </p:txBody>
       </p:sp>
       <p:sp>
         <p:nvSpPr>
@@ -12466,6 +12762,10 @@
             <a:prstDash val="solid"/>
           </a:ln>
         </p:spPr>
+        <p:txBody>
+          <a:bodyPr/>
+          <a:p/>
+        </p:txBody>
       </p:sp>
       <p:sp>
         <p:nvSpPr>
@@ -12532,6 +12832,10 @@
             <a:prstDash val="solid"/>
           </a:ln>
         </p:spPr>
+        <p:txBody>
+          <a:bodyPr/>
+          <a:p/>
+        </p:txBody>
       </p:sp>
       <p:sp>
         <p:nvSpPr>
@@ -12637,6 +12941,10 @@
             <a:prstDash val="solid"/>
           </a:ln>
         </p:spPr>
+        <p:txBody>
+          <a:bodyPr/>
+          <a:p/>
+        </p:txBody>
       </p:sp>
       <p:sp>
         <p:nvSpPr>
@@ -12845,6 +13153,10 @@
             <a:prstDash val="solid"/>
           </a:ln>
         </p:spPr>
+        <p:txBody>
+          <a:bodyPr/>
+          <a:p/>
+        </p:txBody>
       </p:sp>
       <p:sp>
         <p:nvSpPr>
@@ -12989,6 +13301,10 @@
             <a:prstDash val="solid"/>
           </a:ln>
         </p:spPr>
+        <p:txBody>
+          <a:bodyPr/>
+          <a:p/>
+        </p:txBody>
       </p:sp>
       <p:sp>
         <p:nvSpPr>
@@ -13133,6 +13449,10 @@
             <a:prstDash val="solid"/>
           </a:ln>
         </p:spPr>
+        <p:txBody>
+          <a:bodyPr/>
+          <a:p/>
+        </p:txBody>
       </p:sp>
       <p:sp>
         <p:nvSpPr>
@@ -13277,6 +13597,10 @@
             <a:prstDash val="solid"/>
           </a:ln>
         </p:spPr>
+        <p:txBody>
+          <a:bodyPr/>
+          <a:p/>
+        </p:txBody>
       </p:sp>
       <p:sp>
         <p:nvSpPr>
@@ -13421,6 +13745,10 @@
             <a:prstDash val="solid"/>
           </a:ln>
         </p:spPr>
+        <p:txBody>
+          <a:bodyPr/>
+          <a:p/>
+        </p:txBody>
       </p:sp>
       <p:sp>
         <p:nvSpPr>
@@ -13565,6 +13893,10 @@
             <a:prstDash val="solid"/>
           </a:ln>
         </p:spPr>
+        <p:txBody>
+          <a:bodyPr/>
+          <a:p/>
+        </p:txBody>
       </p:sp>
       <p:sp>
         <p:nvSpPr>
@@ -13709,6 +14041,10 @@
             <a:prstDash val="solid"/>
           </a:ln>
         </p:spPr>
+        <p:txBody>
+          <a:bodyPr/>
+          <a:p/>
+        </p:txBody>
       </p:sp>
       <p:sp>
         <p:nvSpPr>
@@ -13860,7 +14196,7 @@
                 <a:ea typeface="Arial" pitchFamily="34" charset="-122"/>
                 <a:cs typeface="Arial" pitchFamily="34" charset="-120"/>
               </a:rPr>
-              <a:t>Lo sectorial se ve en S05. Hoy el método sirve para cualquiera de las quince fracciones del artículo 17.</a:t>
+              <a:t>Lo sectorial se ve en S05. Hoy el método sirve para cualquiera de las dieciséis fracciones del artículo 17, más la V Bis.</a:t>
             </a:r>
             <a:endParaRPr lang="en-US" sz="950" dirty="0"/>
           </a:p>
@@ -13995,6 +14331,10 @@
             <a:prstDash val="solid"/>
           </a:ln>
         </p:spPr>
+        <p:txBody>
+          <a:bodyPr/>
+          <a:p/>
+        </p:txBody>
       </p:sp>
       <p:sp>
         <p:nvSpPr>
@@ -14061,6 +14401,10 @@
             <a:prstDash val="solid"/>
           </a:ln>
         </p:spPr>
+        <p:txBody>
+          <a:bodyPr/>
+          <a:p/>
+        </p:txBody>
       </p:sp>
       <p:sp>
         <p:nvSpPr>
@@ -14127,6 +14471,10 @@
             <a:prstDash val="solid"/>
           </a:ln>
         </p:spPr>
+        <p:txBody>
+          <a:bodyPr/>
+          <a:p/>
+        </p:txBody>
       </p:sp>
       <p:sp>
         <p:nvSpPr>
@@ -14193,6 +14541,10 @@
             <a:prstDash val="solid"/>
           </a:ln>
         </p:spPr>
+        <p:txBody>
+          <a:bodyPr/>
+          <a:p/>
+        </p:txBody>
       </p:sp>
       <p:sp>
         <p:nvSpPr>
@@ -14259,6 +14611,10 @@
             <a:prstDash val="solid"/>
           </a:ln>
         </p:spPr>
+        <p:txBody>
+          <a:bodyPr/>
+          <a:p/>
+        </p:txBody>
       </p:sp>
       <p:sp>
         <p:nvSpPr>
@@ -14325,6 +14681,10 @@
             <a:prstDash val="solid"/>
           </a:ln>
         </p:spPr>
+        <p:txBody>
+          <a:bodyPr/>
+          <a:p/>
+        </p:txBody>
       </p:sp>
       <p:sp>
         <p:nvSpPr>
@@ -14391,6 +14751,10 @@
             <a:prstDash val="solid"/>
           </a:ln>
         </p:spPr>
+        <p:txBody>
+          <a:bodyPr/>
+          <a:p/>
+        </p:txBody>
       </p:sp>
       <p:sp>
         <p:nvSpPr>
@@ -14457,6 +14821,10 @@
             <a:prstDash val="solid"/>
           </a:ln>
         </p:spPr>
+        <p:txBody>
+          <a:bodyPr/>
+          <a:p/>
+        </p:txBody>
       </p:sp>
       <p:sp>
         <p:nvSpPr>
@@ -14523,6 +14891,10 @@
             <a:prstDash val="solid"/>
           </a:ln>
         </p:spPr>
+        <p:txBody>
+          <a:bodyPr/>
+          <a:p/>
+        </p:txBody>
       </p:sp>
       <p:sp>
         <p:nvSpPr>
@@ -14589,6 +14961,10 @@
             <a:prstDash val="solid"/>
           </a:ln>
         </p:spPr>
+        <p:txBody>
+          <a:bodyPr/>
+          <a:p/>
+        </p:txBody>
       </p:sp>
       <p:sp>
         <p:nvSpPr>
@@ -14655,6 +15031,10 @@
             <a:prstDash val="solid"/>
           </a:ln>
         </p:spPr>
+        <p:txBody>
+          <a:bodyPr/>
+          <a:p/>
+        </p:txBody>
       </p:sp>
       <p:sp>
         <p:nvSpPr>
@@ -14721,6 +15101,10 @@
             <a:prstDash val="solid"/>
           </a:ln>
         </p:spPr>
+        <p:txBody>
+          <a:bodyPr/>
+          <a:p/>
+        </p:txBody>
       </p:sp>
       <p:sp>
         <p:nvSpPr>
@@ -14787,6 +15171,10 @@
             <a:prstDash val="solid"/>
           </a:ln>
         </p:spPr>
+        <p:txBody>
+          <a:bodyPr/>
+          <a:p/>
+        </p:txBody>
       </p:sp>
       <p:sp>
         <p:nvSpPr>
@@ -14853,6 +15241,10 @@
             <a:prstDash val="solid"/>
           </a:ln>
         </p:spPr>
+        <p:txBody>
+          <a:bodyPr/>
+          <a:p/>
+        </p:txBody>
       </p:sp>
       <p:sp>
         <p:nvSpPr>
@@ -14919,6 +15311,10 @@
             <a:prstDash val="solid"/>
           </a:ln>
         </p:spPr>
+        <p:txBody>
+          <a:bodyPr/>
+          <a:p/>
+        </p:txBody>
       </p:sp>
       <p:sp>
         <p:nvSpPr>
@@ -14953,7 +15349,7 @@
                 <a:ea typeface="Arial" pitchFamily="34" charset="-122"/>
                 <a:cs typeface="Arial" pitchFamily="34" charset="-120"/>
               </a:rPr>
-              <a:t>Sólo V, VIII y X admiten «No aplica», y de forma condicionada. Las once restantes, no.  ·  RCG 37 Bis y 37 Bis 2</a:t>
+              <a:t>El RCG 37 Bis 2 no enlista fracciones: exenta lo que la entidad declare que no realiza. Que esta matriz sólo habilite «No aplica» en la V, la VIII y la X es criterio de la herramienta.  ·  RCG 37 Bis y 37 Bis 2</a:t>
             </a:r>
             <a:endParaRPr lang="en-US" sz="1050" dirty="0"/>
           </a:p>
@@ -15088,6 +15484,10 @@
             <a:prstDash val="solid"/>
           </a:ln>
         </p:spPr>
+        <p:txBody>
+          <a:bodyPr/>
+          <a:p/>
+        </p:txBody>
       </p:sp>
       <p:sp>
         <p:nvSpPr>
@@ -15115,6 +15515,10 @@
             <a:prstDash val="solid"/>
           </a:ln>
         </p:spPr>
+        <p:txBody>
+          <a:bodyPr/>
+          <a:p/>
+        </p:txBody>
       </p:sp>
       <p:sp>
         <p:nvSpPr>
@@ -15220,6 +15624,10 @@
             <a:prstDash val="solid"/>
           </a:ln>
         </p:spPr>
+        <p:txBody>
+          <a:bodyPr/>
+          <a:p/>
+        </p:txBody>
       </p:sp>
       <p:sp>
         <p:nvSpPr>
@@ -15247,6 +15655,10 @@
             <a:prstDash val="solid"/>
           </a:ln>
         </p:spPr>
+        <p:txBody>
+          <a:bodyPr/>
+          <a:p/>
+        </p:txBody>
       </p:sp>
       <p:sp>
         <p:nvSpPr>
@@ -15352,6 +15764,10 @@
             <a:prstDash val="solid"/>
           </a:ln>
         </p:spPr>
+        <p:txBody>
+          <a:bodyPr/>
+          <a:p/>
+        </p:txBody>
       </p:sp>
       <p:sp>
         <p:nvSpPr>
@@ -15379,6 +15795,10 @@
             <a:prstDash val="solid"/>
           </a:ln>
         </p:spPr>
+        <p:txBody>
+          <a:bodyPr/>
+          <a:p/>
+        </p:txBody>
       </p:sp>
       <p:sp>
         <p:nvSpPr>
@@ -15484,6 +15904,10 @@
             <a:prstDash val="solid"/>
           </a:ln>
         </p:spPr>
+        <p:txBody>
+          <a:bodyPr/>
+          <a:p/>
+        </p:txBody>
       </p:sp>
       <p:sp>
         <p:nvSpPr>
@@ -15511,6 +15935,10 @@
             <a:prstDash val="solid"/>
           </a:ln>
         </p:spPr>
+        <p:txBody>
+          <a:bodyPr/>
+          <a:p/>
+        </p:txBody>
       </p:sp>
       <p:sp>
         <p:nvSpPr>
@@ -15616,6 +16044,10 @@
             <a:prstDash val="solid"/>
           </a:ln>
         </p:spPr>
+        <p:txBody>
+          <a:bodyPr/>
+          <a:p/>
+        </p:txBody>
       </p:sp>
       <p:sp>
         <p:nvSpPr>
@@ -15643,6 +16075,10 @@
             <a:prstDash val="solid"/>
           </a:ln>
         </p:spPr>
+        <p:txBody>
+          <a:bodyPr/>
+          <a:p/>
+        </p:txBody>
       </p:sp>
       <p:sp>
         <p:nvSpPr>
@@ -15748,6 +16184,10 @@
             <a:prstDash val="solid"/>
           </a:ln>
         </p:spPr>
+        <p:txBody>
+          <a:bodyPr/>
+          <a:p/>
+        </p:txBody>
       </p:sp>
       <p:sp>
         <p:nvSpPr>
@@ -15892,6 +16332,10 @@
             <a:prstDash val="solid"/>
           </a:ln>
         </p:spPr>
+        <p:txBody>
+          <a:bodyPr/>
+          <a:p/>
+        </p:txBody>
       </p:sp>
       <p:sp>
         <p:nvSpPr>
@@ -16068,6 +16512,10 @@
             <a:prstDash val="solid"/>
           </a:ln>
         </p:spPr>
+        <p:txBody>
+          <a:bodyPr/>
+          <a:p/>
+        </p:txBody>
       </p:sp>
       <p:sp>
         <p:nvSpPr>
@@ -16173,6 +16621,10 @@
             <a:prstDash val="solid"/>
           </a:ln>
         </p:spPr>
+        <p:txBody>
+          <a:bodyPr/>
+          <a:p/>
+        </p:txBody>
       </p:sp>
       <p:sp>
         <p:nvSpPr>
@@ -16246,7 +16698,7 @@
                 <a:ea typeface="Arial" pitchFamily="34" charset="-122"/>
                 <a:cs typeface="Arial" pitchFamily="34" charset="-120"/>
               </a:rPr>
-              <a:t>Bajo o medio: puede dictaminar auditoría interna. Alto: forzosamente auditor externo independiente.</a:t>
+              <a:t>Bajo o medio: puede dictaminar el área interna (RCG 44). Alto: forzosamente auditor externo independiente; y cualquier nivel puede elegir la vía externa (RCG 45).</a:t>
             </a:r>
             <a:endParaRPr lang="en-US" sz="1000" dirty="0"/>
           </a:p>
@@ -16317,6 +16769,10 @@
             <a:prstDash val="solid"/>
           </a:ln>
         </p:spPr>
+        <p:txBody>
+          <a:bodyPr/>
+          <a:p/>
+        </p:txBody>
       </p:sp>
       <p:sp>
         <p:nvSpPr>
@@ -16390,7 +16846,7 @@
                 <a:ea typeface="Arial" pitchFamily="34" charset="-122"/>
                 <a:cs typeface="Arial" pitchFamily="34" charset="-120"/>
               </a:rPr>
-              <a:t>Sólo con riesgo bajo documentado. Con medio o alto, no proceden.</a:t>
+              <a:t>Dos condiciones acumulativas: entidad de bajo riesgo (R 15) y Cliente de bajo Riesgo (RCG 17).</a:t>
             </a:r>
             <a:endParaRPr lang="en-US" sz="1000" dirty="0"/>
           </a:p>
@@ -16461,6 +16917,10 @@
             <a:prstDash val="solid"/>
           </a:ln>
         </p:spPr>
+        <p:txBody>
+          <a:bodyPr/>
+          <a:p/>
+        </p:txBody>
       </p:sp>
       <p:sp>
         <p:nvSpPr>
@@ -16637,6 +17097,10 @@
             <a:prstDash val="solid"/>
           </a:ln>
         </p:spPr>
+        <p:txBody>
+          <a:bodyPr/>
+          <a:p/>
+        </p:txBody>
       </p:sp>
       <p:sp>
         <p:nvSpPr>
@@ -16811,7 +17275,7 @@
                 <a:ea typeface="Arial" pitchFamily="34" charset="-122"/>
                 <a:cs typeface="Arial" pitchFamily="34" charset="-120"/>
               </a:rPr>
-              <a:t>Hoja B CLIENTE de la matriz. Catorce factores, del primero al último, con el resultado escrito.</a:t>
+              <a:t>Hoja B CLIENTE de la matriz. Veintidós factores, del primero al último, con el resultado escrito.</a:t>
             </a:r>
             <a:endParaRPr lang="en-US" sz="1350" dirty="0"/>
           </a:p>
@@ -16843,6 +17307,10 @@
             <a:prstDash val="solid"/>
           </a:ln>
         </p:spPr>
+        <p:txBody>
+          <a:bodyPr/>
+          <a:p/>
+        </p:txBody>
       </p:sp>
       <p:sp>
         <p:nvSpPr>
@@ -17012,6 +17480,10 @@
             <a:prstDash val="solid"/>
           </a:ln>
         </p:spPr>
+        <p:txBody>
+          <a:bodyPr/>
+          <a:p/>
+        </p:txBody>
       </p:sp>
       <p:sp>
         <p:nvSpPr>
@@ -17039,6 +17511,10 @@
             <a:prstDash val="solid"/>
           </a:ln>
         </p:spPr>
+        <p:txBody>
+          <a:bodyPr/>
+          <a:p/>
+        </p:txBody>
       </p:sp>
       <p:sp>
         <p:nvSpPr>
@@ -17274,6 +17750,10 @@
             <a:prstDash val="solid"/>
           </a:ln>
         </p:spPr>
+        <p:txBody>
+          <a:bodyPr/>
+          <a:p/>
+        </p:txBody>
       </p:sp>
       <p:sp>
         <p:nvSpPr>
@@ -17301,6 +17781,10 @@
             <a:prstDash val="solid"/>
           </a:ln>
         </p:spPr>
+        <p:txBody>
+          <a:bodyPr/>
+          <a:p/>
+        </p:txBody>
       </p:sp>
       <p:sp>
         <p:nvSpPr>
@@ -17536,6 +18020,10 @@
             <a:prstDash val="solid"/>
           </a:ln>
         </p:spPr>
+        <p:txBody>
+          <a:bodyPr/>
+          <a:p/>
+        </p:txBody>
       </p:sp>
       <p:sp>
         <p:nvSpPr>
@@ -17602,6 +18090,10 @@
             <a:prstDash val="solid"/>
           </a:ln>
         </p:spPr>
+        <p:txBody>
+          <a:bodyPr/>
+          <a:p/>
+        </p:txBody>
       </p:sp>
       <p:sp>
         <p:nvSpPr>
@@ -17668,6 +18160,10 @@
             <a:prstDash val="solid"/>
           </a:ln>
         </p:spPr>
+        <p:txBody>
+          <a:bodyPr/>
+          <a:p/>
+        </p:txBody>
       </p:sp>
       <p:sp>
         <p:nvSpPr>
@@ -17734,6 +18230,10 @@
             <a:prstDash val="solid"/>
           </a:ln>
         </p:spPr>
+        <p:txBody>
+          <a:bodyPr/>
+          <a:p/>
+        </p:txBody>
       </p:sp>
       <p:sp>
         <p:nvSpPr>
@@ -17800,6 +18300,10 @@
             <a:prstDash val="solid"/>
           </a:ln>
         </p:spPr>
+        <p:txBody>
+          <a:bodyPr/>
+          <a:p/>
+        </p:txBody>
       </p:sp>
       <p:sp>
         <p:nvSpPr>
@@ -17969,6 +18473,10 @@
             <a:prstDash val="solid"/>
           </a:ln>
         </p:spPr>
+        <p:txBody>
+          <a:bodyPr/>
+          <a:p/>
+        </p:txBody>
       </p:sp>
       <p:sp>
         <p:nvSpPr>
@@ -18035,6 +18543,10 @@
             <a:prstDash val="solid"/>
           </a:ln>
         </p:spPr>
+        <p:txBody>
+          <a:bodyPr/>
+          <a:p/>
+        </p:txBody>
       </p:sp>
       <p:sp>
         <p:nvSpPr>
@@ -18101,6 +18613,10 @@
             <a:prstDash val="solid"/>
           </a:ln>
         </p:spPr>
+        <p:txBody>
+          <a:bodyPr/>
+          <a:p/>
+        </p:txBody>
       </p:sp>
       <p:sp>
         <p:nvSpPr>
@@ -18167,6 +18683,10 @@
             <a:prstDash val="solid"/>
           </a:ln>
         </p:spPr>
+        <p:txBody>
+          <a:bodyPr/>
+          <a:p/>
+        </p:txBody>
       </p:sp>
       <p:sp>
         <p:nvSpPr>
@@ -18233,6 +18753,10 @@
             <a:prstDash val="solid"/>
           </a:ln>
         </p:spPr>
+        <p:txBody>
+          <a:bodyPr/>
+          <a:p/>
+        </p:txBody>
       </p:sp>
       <p:sp>
         <p:nvSpPr>
@@ -18299,6 +18823,10 @@
             <a:prstDash val="solid"/>
           </a:ln>
         </p:spPr>
+        <p:txBody>
+          <a:bodyPr/>
+          <a:p/>
+        </p:txBody>
       </p:sp>
       <p:sp>
         <p:nvSpPr>
@@ -18404,6 +18932,10 @@
             <a:prstDash val="solid"/>
           </a:ln>
         </p:spPr>
+        <p:txBody>
+          <a:bodyPr/>
+          <a:p/>
+        </p:txBody>
       </p:sp>
       <p:sp>
         <p:nvSpPr>
@@ -18509,6 +19041,10 @@
             <a:prstDash val="solid"/>
           </a:ln>
         </p:spPr>
+        <p:txBody>
+          <a:bodyPr/>
+          <a:p/>
+        </p:txBody>
       </p:sp>
       <p:sp>
         <p:nvSpPr>
@@ -18614,6 +19150,10 @@
             <a:prstDash val="solid"/>
           </a:ln>
         </p:spPr>
+        <p:txBody>
+          <a:bodyPr/>
+          <a:p/>
+        </p:txBody>
       </p:sp>
       <p:sp>
         <p:nvSpPr>
@@ -18719,6 +19259,10 @@
             <a:prstDash val="solid"/>
           </a:ln>
         </p:spPr>
+        <p:txBody>
+          <a:bodyPr/>
+          <a:p/>
+        </p:txBody>
       </p:sp>
       <p:sp>
         <p:nvSpPr>
@@ -18888,6 +19432,10 @@
             <a:prstDash val="solid"/>
           </a:ln>
         </p:spPr>
+        <p:txBody>
+          <a:bodyPr/>
+          <a:p/>
+        </p:txBody>
       </p:sp>
       <p:sp>
         <p:nvSpPr>
@@ -18915,6 +19463,10 @@
             <a:prstDash val="solid"/>
           </a:ln>
         </p:spPr>
+        <p:txBody>
+          <a:bodyPr/>
+          <a:p/>
+        </p:txBody>
       </p:sp>
       <p:sp>
         <p:nvSpPr>
@@ -19020,6 +19572,10 @@
             <a:prstDash val="solid"/>
           </a:ln>
         </p:spPr>
+        <p:txBody>
+          <a:bodyPr/>
+          <a:p/>
+        </p:txBody>
       </p:sp>
       <p:sp>
         <p:nvSpPr>
@@ -19047,6 +19603,10 @@
             <a:prstDash val="solid"/>
           </a:ln>
         </p:spPr>
+        <p:txBody>
+          <a:bodyPr/>
+          <a:p/>
+        </p:txBody>
       </p:sp>
       <p:sp>
         <p:nvSpPr>
@@ -19152,6 +19712,10 @@
             <a:prstDash val="solid"/>
           </a:ln>
         </p:spPr>
+        <p:txBody>
+          <a:bodyPr/>
+          <a:p/>
+        </p:txBody>
       </p:sp>
       <p:sp>
         <p:nvSpPr>
@@ -19218,6 +19782,10 @@
             <a:prstDash val="solid"/>
           </a:ln>
         </p:spPr>
+        <p:txBody>
+          <a:bodyPr/>
+          <a:p/>
+        </p:txBody>
       </p:sp>
       <p:sp>
         <p:nvSpPr>
@@ -19284,6 +19852,10 @@
             <a:prstDash val="solid"/>
           </a:ln>
         </p:spPr>
+        <p:txBody>
+          <a:bodyPr/>
+          <a:p/>
+        </p:txBody>
       </p:sp>
       <p:sp>
         <p:nvSpPr>
@@ -19375,6 +19947,10 @@
             <a:prstDash val="solid"/>
           </a:ln>
         </p:spPr>
+        <p:txBody>
+          <a:bodyPr/>
+          <a:p/>
+        </p:txBody>
       </p:sp>
       <p:sp>
         <p:nvSpPr>
@@ -19519,6 +20095,10 @@
             <a:prstDash val="solid"/>
           </a:ln>
         </p:spPr>
+        <p:txBody>
+          <a:bodyPr/>
+          <a:p/>
+        </p:txBody>
       </p:sp>
       <p:sp>
         <p:nvSpPr>
@@ -19546,6 +20126,10 @@
             <a:prstDash val="solid"/>
           </a:ln>
         </p:spPr>
+        <p:txBody>
+          <a:bodyPr/>
+          <a:p/>
+        </p:txBody>
       </p:sp>
       <p:sp>
         <p:nvSpPr>
@@ -19651,6 +20235,10 @@
             <a:prstDash val="solid"/>
           </a:ln>
         </p:spPr>
+        <p:txBody>
+          <a:bodyPr/>
+          <a:p/>
+        </p:txBody>
       </p:sp>
       <p:sp>
         <p:nvSpPr>
@@ -19678,6 +20266,10 @@
             <a:prstDash val="solid"/>
           </a:ln>
         </p:spPr>
+        <p:txBody>
+          <a:bodyPr/>
+          <a:p/>
+        </p:txBody>
       </p:sp>
       <p:sp>
         <p:nvSpPr>
@@ -19783,6 +20375,10 @@
             <a:prstDash val="solid"/>
           </a:ln>
         </p:spPr>
+        <p:txBody>
+          <a:bodyPr/>
+          <a:p/>
+        </p:txBody>
       </p:sp>
       <p:sp>
         <p:nvSpPr>
@@ -19810,6 +20406,10 @@
             <a:prstDash val="solid"/>
           </a:ln>
         </p:spPr>
+        <p:txBody>
+          <a:bodyPr/>
+          <a:p/>
+        </p:txBody>
       </p:sp>
       <p:sp>
         <p:nvSpPr>
@@ -19915,6 +20515,10 @@
             <a:prstDash val="solid"/>
           </a:ln>
         </p:spPr>
+        <p:txBody>
+          <a:bodyPr/>
+          <a:p/>
+        </p:txBody>
       </p:sp>
       <p:sp>
         <p:nvSpPr>
@@ -20084,6 +20688,10 @@
             <a:prstDash val="solid"/>
           </a:ln>
         </p:spPr>
+        <p:txBody>
+          <a:bodyPr/>
+          <a:p/>
+        </p:txBody>
       </p:sp>
       <p:sp>
         <p:nvSpPr>
@@ -20228,6 +20836,10 @@
             <a:prstDash val="solid"/>
           </a:ln>
         </p:spPr>
+        <p:txBody>
+          <a:bodyPr/>
+          <a:p/>
+        </p:txBody>
       </p:sp>
       <p:sp>
         <p:nvSpPr>
@@ -20301,7 +20913,7 @@
                 <a:ea typeface="Georgia" pitchFamily="34" charset="-122"/>
                 <a:cs typeface="Georgia" pitchFamily="34" charset="-120"/>
               </a:rPr>
-              <a:t>El riesgo de la ENTIDAD</a:t>
+              <a:t>La ENTIDAD y el CLIENTE</a:t>
             </a:r>
             <a:endParaRPr lang="en-US" sz="1700" dirty="0"/>
           </a:p>
@@ -20340,7 +20952,7 @@
                 <a:ea typeface="Arial" pitchFamily="34" charset="-122"/>
                 <a:cs typeface="Arial" pitchFamily="34" charset="-120"/>
               </a:rPr>
-              <a:t>Sólo si tu evaluación de entidad quedó en bajo puedes cumplir la identificación con medidas simplificadas.</a:t>
+              <a:t>Hacen falta las dos: entidad de bajo riesgo (R 15) y Cliente clasificado de bajo Riesgo conforme al Capítulo III Bis (RCG 17). Ninguno de los dos preceptos repite la condición del otro.</a:t>
             </a:r>
             <a:endParaRPr lang="en-US" sz="1100" dirty="0"/>
           </a:p>
@@ -20372,6 +20984,10 @@
             <a:prstDash val="solid"/>
           </a:ln>
         </p:spPr>
+        <p:txBody>
+          <a:bodyPr/>
+          <a:p/>
+        </p:txBody>
       </p:sp>
       <p:sp>
         <p:nvSpPr>
@@ -20441,6 +21057,10 @@
             <a:prstDash val="solid"/>
           </a:ln>
         </p:spPr>
+        <p:txBody>
+          <a:bodyPr/>
+          <a:p/>
+        </p:txBody>
       </p:sp>
       <p:sp>
         <p:nvSpPr>
@@ -20507,6 +21127,10 @@
             <a:prstDash val="solid"/>
           </a:ln>
         </p:spPr>
+        <p:txBody>
+          <a:bodyPr/>
+          <a:p/>
+        </p:txBody>
       </p:sp>
       <p:sp>
         <p:nvSpPr>
@@ -20573,6 +21197,10 @@
             <a:prstDash val="solid"/>
           </a:ln>
         </p:spPr>
+        <p:txBody>
+          <a:bodyPr/>
+          <a:p/>
+        </p:txBody>
       </p:sp>
       <p:sp>
         <p:nvSpPr>
@@ -20639,6 +21267,10 @@
             <a:prstDash val="solid"/>
           </a:ln>
         </p:spPr>
+        <p:txBody>
+          <a:bodyPr/>
+          <a:p/>
+        </p:txBody>
       </p:sp>
       <p:sp>
         <p:nvSpPr>
@@ -20705,6 +21337,10 @@
             <a:prstDash val="solid"/>
           </a:ln>
         </p:spPr>
+        <p:txBody>
+          <a:bodyPr/>
+          <a:p/>
+        </p:txBody>
       </p:sp>
       <p:sp>
         <p:nvSpPr>
@@ -20771,6 +21407,10 @@
             <a:prstDash val="solid"/>
           </a:ln>
         </p:spPr>
+        <p:txBody>
+          <a:bodyPr/>
+          <a:p/>
+        </p:txBody>
       </p:sp>
       <p:sp>
         <p:nvSpPr>
@@ -20805,7 +21445,7 @@
                 <a:ea typeface="Arial" pitchFamily="34" charset="-122"/>
                 <a:cs typeface="Arial" pitchFamily="34" charset="-120"/>
               </a:rPr>
-              <a:t>23 Ter</a:t>
+              <a:t>17 · 23 Ter</a:t>
             </a:r>
             <a:endParaRPr lang="en-US" sz="900" dirty="0"/>
           </a:p>
@@ -20940,6 +21580,10 @@
             <a:prstDash val="solid"/>
           </a:ln>
         </p:spPr>
+        <p:txBody>
+          <a:bodyPr/>
+          <a:p/>
+        </p:txBody>
       </p:sp>
       <p:sp>
         <p:nvSpPr>
@@ -20967,6 +21611,10 @@
             <a:prstDash val="solid"/>
           </a:ln>
         </p:spPr>
+        <p:txBody>
+          <a:bodyPr/>
+          <a:p/>
+        </p:txBody>
       </p:sp>
       <p:sp>
         <p:nvSpPr>
@@ -21072,6 +21720,10 @@
             <a:prstDash val="solid"/>
           </a:ln>
         </p:spPr>
+        <p:txBody>
+          <a:bodyPr/>
+          <a:p/>
+        </p:txBody>
       </p:sp>
       <p:sp>
         <p:nvSpPr>
@@ -21099,6 +21751,10 @@
             <a:prstDash val="solid"/>
           </a:ln>
         </p:spPr>
+        <p:txBody>
+          <a:bodyPr/>
+          <a:p/>
+        </p:txBody>
       </p:sp>
       <p:sp>
         <p:nvSpPr>
@@ -21204,6 +21860,10 @@
             <a:prstDash val="solid"/>
           </a:ln>
         </p:spPr>
+        <p:txBody>
+          <a:bodyPr/>
+          <a:p/>
+        </p:txBody>
       </p:sp>
       <p:sp>
         <p:nvSpPr>
@@ -21231,6 +21891,10 @@
             <a:prstDash val="solid"/>
           </a:ln>
         </p:spPr>
+        <p:txBody>
+          <a:bodyPr/>
+          <a:p/>
+        </p:txBody>
       </p:sp>
       <p:sp>
         <p:nvSpPr>
@@ -21336,6 +22000,10 @@
             <a:prstDash val="solid"/>
           </a:ln>
         </p:spPr>
+        <p:txBody>
+          <a:bodyPr/>
+          <a:p/>
+        </p:txBody>
       </p:sp>
       <p:sp>
         <p:nvSpPr>
@@ -21464,6 +22132,10 @@
             <a:prstDash val="solid"/>
           </a:ln>
         </p:spPr>
+        <p:txBody>
+          <a:bodyPr/>
+          <a:p/>
+        </p:txBody>
       </p:sp>
       <p:sp>
         <p:nvSpPr>
@@ -21606,6 +22278,10 @@
             <a:prstDash val="solid"/>
           </a:ln>
         </p:spPr>
+        <p:txBody>
+          <a:bodyPr/>
+          <a:p/>
+        </p:txBody>
       </p:sp>
       <p:sp>
         <p:nvSpPr>
@@ -21718,7 +22394,7 @@
                 <a:ea typeface="Arial" pitchFamily="34" charset="-122"/>
                 <a:cs typeface="Arial" pitchFamily="34" charset="-120"/>
               </a:rPr>
-              <a:t>La matriz completa con una inmobiliaria de ejemplo: las quince hojas llenas, no una plantilla vacía.</a:t>
+              <a:t>La matriz completa con una inmobiliaria de ejemplo: las diecisiete hojas llenas, no una plantilla vacía.</a:t>
             </a:r>
             <a:endParaRPr lang="en-US" sz="1150" dirty="0"/>
           </a:p>
@@ -21748,6 +22424,10 @@
             <a:prstDash val="solid"/>
           </a:ln>
         </p:spPr>
+        <p:txBody>
+          <a:bodyPr/>
+          <a:p/>
+        </p:txBody>
       </p:sp>
       <p:sp>
         <p:nvSpPr>
@@ -21821,7 +22501,7 @@
                 <a:ea typeface="Arial" pitchFamily="34" charset="-122"/>
                 <a:cs typeface="Arial" pitchFamily="34" charset="-120"/>
               </a:rPr>
-              <a:t>La guía de las quince pestañas</a:t>
+              <a:t>La guía de las diecisiete pestañas</a:t>
             </a:r>
             <a:endParaRPr lang="en-US" sz="1450" dirty="0"/>
           </a:p>
@@ -22034,6 +22714,10 @@
             <a:prstDash val="solid"/>
           </a:ln>
         </p:spPr>
+        <p:txBody>
+          <a:bodyPr/>
+          <a:p/>
+        </p:txBody>
       </p:sp>
       <p:sp>
         <p:nvSpPr>
@@ -22139,6 +22823,10 @@
             <a:prstDash val="solid"/>
           </a:ln>
         </p:spPr>
+        <p:txBody>
+          <a:bodyPr/>
+          <a:p/>
+        </p:txBody>
       </p:sp>
       <p:sp>
         <p:nvSpPr>
@@ -22205,6 +22893,10 @@
             <a:prstDash val="solid"/>
           </a:ln>
         </p:spPr>
+        <p:txBody>
+          <a:bodyPr/>
+          <a:p/>
+        </p:txBody>
       </p:sp>
       <p:sp>
         <p:nvSpPr>
@@ -22271,6 +22963,10 @@
             <a:prstDash val="solid"/>
           </a:ln>
         </p:spPr>
+        <p:txBody>
+          <a:bodyPr/>
+          <a:p/>
+        </p:txBody>
       </p:sp>
       <p:sp>
         <p:nvSpPr>
@@ -22376,6 +23072,10 @@
             <a:prstDash val="solid"/>
           </a:ln>
         </p:spPr>
+        <p:txBody>
+          <a:bodyPr/>
+          <a:p/>
+        </p:txBody>
       </p:sp>
       <p:sp>
         <p:nvSpPr>
@@ -22442,6 +23142,10 @@
             <a:prstDash val="solid"/>
           </a:ln>
         </p:spPr>
+        <p:txBody>
+          <a:bodyPr/>
+          <a:p/>
+        </p:txBody>
       </p:sp>
       <p:sp>
         <p:nvSpPr>
@@ -22508,6 +23212,10 @@
             <a:prstDash val="solid"/>
           </a:ln>
         </p:spPr>
+        <p:txBody>
+          <a:bodyPr/>
+          <a:p/>
+        </p:txBody>
       </p:sp>
       <p:sp>
         <p:nvSpPr>
@@ -22613,6 +23321,10 @@
             <a:prstDash val="solid"/>
           </a:ln>
         </p:spPr>
+        <p:txBody>
+          <a:bodyPr/>
+          <a:p/>
+        </p:txBody>
       </p:sp>
       <p:sp>
         <p:nvSpPr>
@@ -22679,6 +23391,10 @@
             <a:prstDash val="solid"/>
           </a:ln>
         </p:spPr>
+        <p:txBody>
+          <a:bodyPr/>
+          <a:p/>
+        </p:txBody>
       </p:sp>
       <p:sp>
         <p:nvSpPr>
@@ -22745,6 +23461,10 @@
             <a:prstDash val="solid"/>
           </a:ln>
         </p:spPr>
+        <p:txBody>
+          <a:bodyPr/>
+          <a:p/>
+        </p:txBody>
       </p:sp>
       <p:sp>
         <p:nvSpPr>
@@ -22779,7 +23499,7 @@
                 <a:ea typeface="Arial" pitchFamily="34" charset="-122"/>
                 <a:cs typeface="Arial" pitchFamily="34" charset="-120"/>
               </a:rPr>
-              <a:t>El paquete mínimo ante un requerimiento está en la sección 19 de tu guía de uso.</a:t>
+              <a:t>El paquete mínimo ante un requerimiento está en la sección 6 de tu guía de uso.</a:t>
             </a:r>
             <a:endParaRPr lang="en-US" sz="1050" dirty="0"/>
           </a:p>
@@ -22836,6 +23556,10 @@
             <a:prstDash val="solid"/>
           </a:ln>
         </p:spPr>
+        <p:txBody>
+          <a:bodyPr/>
+          <a:p/>
+        </p:txBody>
       </p:sp>
       <p:sp>
         <p:nvSpPr>
@@ -22948,7 +23672,7 @@
                 <a:ea typeface="Arial" pitchFamily="34" charset="-122"/>
                 <a:cs typeface="Arial" pitchFamily="34" charset="-120"/>
               </a:rPr>
-              <a:t>Quince pestañas con el caso resuelto. El orden de las pestañas no es el orden de trabajo.</a:t>
+              <a:t>Diecisiete pestañas con el caso resuelto. El orden de las pestañas no es el orden de trabajo.</a:t>
             </a:r>
             <a:endParaRPr lang="en-US" sz="1250" dirty="0"/>
           </a:p>
@@ -22980,6 +23704,10 @@
             <a:prstDash val="solid"/>
           </a:ln>
         </p:spPr>
+        <p:txBody>
+          <a:bodyPr/>
+          <a:p/>
+        </p:txBody>
       </p:sp>
       <p:sp>
         <p:nvSpPr>
@@ -23007,6 +23735,10 @@
             <a:prstDash val="solid"/>
           </a:ln>
         </p:spPr>
+        <p:txBody>
+          <a:bodyPr/>
+          <a:p/>
+        </p:txBody>
       </p:sp>
       <p:sp>
         <p:nvSpPr>
@@ -23151,6 +23883,10 @@
             <a:prstDash val="solid"/>
           </a:ln>
         </p:spPr>
+        <p:txBody>
+          <a:bodyPr/>
+          <a:p/>
+        </p:txBody>
       </p:sp>
       <p:sp>
         <p:nvSpPr>
@@ -23178,6 +23914,10 @@
             <a:prstDash val="solid"/>
           </a:ln>
         </p:spPr>
+        <p:txBody>
+          <a:bodyPr/>
+          <a:p/>
+        </p:txBody>
       </p:sp>
       <p:sp>
         <p:nvSpPr>
@@ -23322,6 +24062,10 @@
             <a:prstDash val="solid"/>
           </a:ln>
         </p:spPr>
+        <p:txBody>
+          <a:bodyPr/>
+          <a:p/>
+        </p:txBody>
       </p:sp>
       <p:sp>
         <p:nvSpPr>
@@ -23349,6 +24093,10 @@
             <a:prstDash val="solid"/>
           </a:ln>
         </p:spPr>
+        <p:txBody>
+          <a:bodyPr/>
+          <a:p/>
+        </p:txBody>
       </p:sp>
       <p:sp>
         <p:nvSpPr>
@@ -23493,6 +24241,10 @@
             <a:prstDash val="solid"/>
           </a:ln>
         </p:spPr>
+        <p:txBody>
+          <a:bodyPr/>
+          <a:p/>
+        </p:txBody>
       </p:sp>
       <p:sp>
         <p:nvSpPr>
@@ -23520,6 +24272,10 @@
             <a:prstDash val="solid"/>
           </a:ln>
         </p:spPr>
+        <p:txBody>
+          <a:bodyPr/>
+          <a:p/>
+        </p:txBody>
       </p:sp>
       <p:sp>
         <p:nvSpPr>
@@ -23664,6 +24420,10 @@
             <a:prstDash val="solid"/>
           </a:ln>
         </p:spPr>
+        <p:txBody>
+          <a:bodyPr/>
+          <a:p/>
+        </p:txBody>
       </p:sp>
       <p:sp>
         <p:nvSpPr>
@@ -23691,6 +24451,10 @@
             <a:prstDash val="solid"/>
           </a:ln>
         </p:spPr>
+        <p:txBody>
+          <a:bodyPr/>
+          <a:p/>
+        </p:txBody>
       </p:sp>
       <p:sp>
         <p:nvSpPr>
@@ -23835,6 +24599,10 @@
             <a:prstDash val="solid"/>
           </a:ln>
         </p:spPr>
+        <p:txBody>
+          <a:bodyPr/>
+          <a:p/>
+        </p:txBody>
       </p:sp>
       <p:sp>
         <p:nvSpPr>
@@ -23862,6 +24630,10 @@
             <a:prstDash val="solid"/>
           </a:ln>
         </p:spPr>
+        <p:txBody>
+          <a:bodyPr/>
+          <a:p/>
+        </p:txBody>
       </p:sp>
       <p:sp>
         <p:nvSpPr>
@@ -24006,6 +24778,10 @@
             <a:prstDash val="solid"/>
           </a:ln>
         </p:spPr>
+        <p:txBody>
+          <a:bodyPr/>
+          <a:p/>
+        </p:txBody>
       </p:sp>
       <p:sp>
         <p:nvSpPr>
@@ -24033,6 +24809,10 @@
             <a:prstDash val="solid"/>
           </a:ln>
         </p:spPr>
+        <p:txBody>
+          <a:bodyPr/>
+          <a:p/>
+        </p:txBody>
       </p:sp>
       <p:sp>
         <p:nvSpPr>
@@ -24177,6 +24957,10 @@
             <a:prstDash val="solid"/>
           </a:ln>
         </p:spPr>
+        <p:txBody>
+          <a:bodyPr/>
+          <a:p/>
+        </p:txBody>
       </p:sp>
       <p:sp>
         <p:nvSpPr>
@@ -24204,6 +24988,10 @@
             <a:prstDash val="solid"/>
           </a:ln>
         </p:spPr>
+        <p:txBody>
+          <a:bodyPr/>
+          <a:p/>
+        </p:txBody>
       </p:sp>
       <p:sp>
         <p:nvSpPr>
@@ -24348,6 +25136,10 @@
             <a:prstDash val="solid"/>
           </a:ln>
         </p:spPr>
+        <p:txBody>
+          <a:bodyPr/>
+          <a:p/>
+        </p:txBody>
       </p:sp>
       <p:sp>
         <p:nvSpPr>
@@ -24375,6 +25167,10 @@
             <a:prstDash val="solid"/>
           </a:ln>
         </p:spPr>
+        <p:txBody>
+          <a:bodyPr/>
+          <a:p/>
+        </p:txBody>
       </p:sp>
       <p:sp>
         <p:nvSpPr>
@@ -24519,6 +25315,10 @@
             <a:prstDash val="solid"/>
           </a:ln>
         </p:spPr>
+        <p:txBody>
+          <a:bodyPr/>
+          <a:p/>
+        </p:txBody>
       </p:sp>
       <p:sp>
         <p:nvSpPr>
@@ -24546,6 +25346,10 @@
             <a:prstDash val="solid"/>
           </a:ln>
         </p:spPr>
+        <p:txBody>
+          <a:bodyPr/>
+          <a:p/>
+        </p:txBody>
       </p:sp>
       <p:sp>
         <p:nvSpPr>
@@ -24690,6 +25494,10 @@
             <a:prstDash val="solid"/>
           </a:ln>
         </p:spPr>
+        <p:txBody>
+          <a:bodyPr/>
+          <a:p/>
+        </p:txBody>
       </p:sp>
       <p:sp>
         <p:nvSpPr>
@@ -24717,6 +25525,10 @@
             <a:prstDash val="solid"/>
           </a:ln>
         </p:spPr>
+        <p:txBody>
+          <a:bodyPr/>
+          <a:p/>
+        </p:txBody>
       </p:sp>
       <p:sp>
         <p:nvSpPr>
@@ -24861,6 +25673,10 @@
             <a:prstDash val="solid"/>
           </a:ln>
         </p:spPr>
+        <p:txBody>
+          <a:bodyPr/>
+          <a:p/>
+        </p:txBody>
       </p:sp>
       <p:sp>
         <p:nvSpPr>
@@ -24888,6 +25704,10 @@
             <a:prstDash val="solid"/>
           </a:ln>
         </p:spPr>
+        <p:txBody>
+          <a:bodyPr/>
+          <a:p/>
+        </p:txBody>
       </p:sp>
       <p:sp>
         <p:nvSpPr>
@@ -25032,6 +25852,10 @@
             <a:prstDash val="solid"/>
           </a:ln>
         </p:spPr>
+        <p:txBody>
+          <a:bodyPr/>
+          <a:p/>
+        </p:txBody>
       </p:sp>
       <p:sp>
         <p:nvSpPr>
@@ -25247,6 +26071,10 @@
             <a:prstDash val="solid"/>
           </a:ln>
         </p:spPr>
+        <p:txBody>
+          <a:bodyPr/>
+          <a:p/>
+        </p:txBody>
       </p:sp>
       <p:sp>
         <p:nvSpPr>
@@ -25352,6 +26180,10 @@
             <a:prstDash val="solid"/>
           </a:ln>
         </p:spPr>
+        <p:txBody>
+          <a:bodyPr/>
+          <a:p/>
+        </p:txBody>
       </p:sp>
       <p:sp>
         <p:nvSpPr>
@@ -25457,6 +26289,10 @@
             <a:prstDash val="solid"/>
           </a:ln>
         </p:spPr>
+        <p:txBody>
+          <a:bodyPr/>
+          <a:p/>
+        </p:txBody>
       </p:sp>
       <p:sp>
         <p:nvSpPr>
@@ -25562,6 +26398,10 @@
             <a:prstDash val="solid"/>
           </a:ln>
         </p:spPr>
+        <p:txBody>
+          <a:bodyPr/>
+          <a:p/>
+        </p:txBody>
       </p:sp>
       <p:sp>
         <p:nvSpPr>
@@ -25653,6 +26493,10 @@
             <a:prstDash val="solid"/>
           </a:ln>
         </p:spPr>
+        <p:txBody>
+          <a:bodyPr/>
+          <a:p/>
+        </p:txBody>
       </p:sp>
       <p:sp>
         <p:nvSpPr>
@@ -25797,6 +26641,10 @@
             <a:prstDash val="solid"/>
           </a:ln>
         </p:spPr>
+        <p:txBody>
+          <a:bodyPr/>
+          <a:p/>
+        </p:txBody>
       </p:sp>
       <p:sp>
         <p:nvSpPr>
@@ -25824,6 +26672,10 @@
             <a:prstDash val="solid"/>
           </a:ln>
         </p:spPr>
+        <p:txBody>
+          <a:bodyPr/>
+          <a:p/>
+        </p:txBody>
       </p:sp>
       <p:sp>
         <p:nvSpPr>
@@ -25929,6 +26781,10 @@
             <a:prstDash val="solid"/>
           </a:ln>
         </p:spPr>
+        <p:txBody>
+          <a:bodyPr/>
+          <a:p/>
+        </p:txBody>
       </p:sp>
       <p:sp>
         <p:nvSpPr>
@@ -25956,6 +26812,10 @@
             <a:prstDash val="solid"/>
           </a:ln>
         </p:spPr>
+        <p:txBody>
+          <a:bodyPr/>
+          <a:p/>
+        </p:txBody>
       </p:sp>
       <p:sp>
         <p:nvSpPr>
@@ -26061,6 +26921,10 @@
             <a:prstDash val="solid"/>
           </a:ln>
         </p:spPr>
+        <p:txBody>
+          <a:bodyPr/>
+          <a:p/>
+        </p:txBody>
       </p:sp>
       <p:sp>
         <p:nvSpPr>
@@ -26088,6 +26952,10 @@
             <a:prstDash val="solid"/>
           </a:ln>
         </p:spPr>
+        <p:txBody>
+          <a:bodyPr/>
+          <a:p/>
+        </p:txBody>
       </p:sp>
       <p:sp>
         <p:nvSpPr>
@@ -26193,6 +27061,10 @@
             <a:prstDash val="solid"/>
           </a:ln>
         </p:spPr>
+        <p:txBody>
+          <a:bodyPr/>
+          <a:p/>
+        </p:txBody>
       </p:sp>
       <p:sp>
         <p:nvSpPr>
@@ -26227,7 +27099,7 @@
                 <a:ea typeface="Arial" pitchFamily="34" charset="-122"/>
                 <a:cs typeface="Arial" pitchFamily="34" charset="-120"/>
               </a:rPr>
-              <a:t>Los diez errores completos están en la sección 18 de tu guía de uso.</a:t>
+              <a:t>Los diez errores completos están en la sección 5 de tu guía de uso.</a:t>
             </a:r>
             <a:endParaRPr lang="en-US" sz="1050" dirty="0"/>
           </a:p>
@@ -26369,6 +27241,10 @@
             <a:prstDash val="solid"/>
           </a:ln>
         </p:spPr>
+        <p:txBody>
+          <a:bodyPr/>
+          <a:p/>
+        </p:txBody>
       </p:sp>
       <p:sp>
         <p:nvSpPr>
@@ -26474,6 +27350,10 @@
             <a:prstDash val="solid"/>
           </a:ln>
         </p:spPr>
+        <p:txBody>
+          <a:bodyPr/>
+          <a:p/>
+        </p:txBody>
       </p:sp>
       <p:sp>
         <p:nvSpPr>
@@ -26579,6 +27459,10 @@
             <a:prstDash val="solid"/>
           </a:ln>
         </p:spPr>
+        <p:txBody>
+          <a:bodyPr/>
+          <a:p/>
+        </p:txBody>
       </p:sp>
       <p:sp>
         <p:nvSpPr>
@@ -26787,6 +27671,10 @@
             <a:prstDash val="solid"/>
           </a:ln>
         </p:spPr>
+        <p:txBody>
+          <a:bodyPr/>
+          <a:p/>
+        </p:txBody>
       </p:sp>
       <p:sp>
         <p:nvSpPr>
@@ -26931,6 +27819,10 @@
             <a:prstDash val="solid"/>
           </a:ln>
         </p:spPr>
+        <p:txBody>
+          <a:bodyPr/>
+          <a:p/>
+        </p:txBody>
       </p:sp>
       <p:sp>
         <p:nvSpPr>
@@ -27082,6 +27974,10 @@
             <a:prstDash val="solid"/>
           </a:ln>
         </p:spPr>
+        <p:txBody>
+          <a:bodyPr/>
+          <a:p/>
+        </p:txBody>
       </p:sp>
       <p:sp>
         <p:nvSpPr>
@@ -27483,6 +28379,10 @@
             <a:prstDash val="solid"/>
           </a:ln>
         </p:spPr>
+        <p:txBody>
+          <a:bodyPr/>
+          <a:p/>
+        </p:txBody>
       </p:sp>
       <p:sp>
         <p:nvSpPr>
@@ -27549,6 +28449,10 @@
             <a:prstDash val="solid"/>
           </a:ln>
         </p:spPr>
+        <p:txBody>
+          <a:bodyPr/>
+          <a:p/>
+        </p:txBody>
       </p:sp>
       <p:sp>
         <p:nvSpPr>
@@ -27615,6 +28519,10 @@
             <a:prstDash val="solid"/>
           </a:ln>
         </p:spPr>
+        <p:txBody>
+          <a:bodyPr/>
+          <a:p/>
+        </p:txBody>
       </p:sp>
       <p:sp>
         <p:nvSpPr>
@@ -27784,6 +28692,10 @@
             <a:prstDash val="solid"/>
           </a:ln>
         </p:spPr>
+        <p:txBody>
+          <a:bodyPr/>
+          <a:p/>
+        </p:txBody>
       </p:sp>
       <p:sp>
         <p:nvSpPr>
@@ -27811,6 +28723,10 @@
             <a:prstDash val="solid"/>
           </a:ln>
         </p:spPr>
+        <p:txBody>
+          <a:bodyPr/>
+          <a:p/>
+        </p:txBody>
       </p:sp>
       <p:sp>
         <p:nvSpPr>
@@ -28111,6 +29027,10 @@
             <a:prstDash val="solid"/>
           </a:ln>
         </p:spPr>
+        <p:txBody>
+          <a:bodyPr/>
+          <a:p/>
+        </p:txBody>
       </p:sp>
       <p:sp>
         <p:nvSpPr>
@@ -28177,6 +29097,10 @@
             <a:prstDash val="solid"/>
           </a:ln>
         </p:spPr>
+        <p:txBody>
+          <a:bodyPr/>
+          <a:p/>
+        </p:txBody>
       </p:sp>
       <p:sp>
         <p:nvSpPr>
@@ -28243,6 +29167,10 @@
             <a:prstDash val="solid"/>
           </a:ln>
         </p:spPr>
+        <p:txBody>
+          <a:bodyPr/>
+          <a:p/>
+        </p:txBody>
       </p:sp>
       <p:sp>
         <p:nvSpPr>
@@ -28270,6 +29198,10 @@
             <a:prstDash val="solid"/>
           </a:ln>
         </p:spPr>
+        <p:txBody>
+          <a:bodyPr/>
+          <a:p/>
+        </p:txBody>
       </p:sp>
       <p:sp>
         <p:nvSpPr>
@@ -28570,6 +29502,10 @@
             <a:prstDash val="solid"/>
           </a:ln>
         </p:spPr>
+        <p:txBody>
+          <a:bodyPr/>
+          <a:p/>
+        </p:txBody>
       </p:sp>
       <p:sp>
         <p:nvSpPr>
@@ -28636,6 +29572,10 @@
             <a:prstDash val="solid"/>
           </a:ln>
         </p:spPr>
+        <p:txBody>
+          <a:bodyPr/>
+          <a:p/>
+        </p:txBody>
       </p:sp>
       <p:sp>
         <p:nvSpPr>
@@ -28766,6 +29706,10 @@
             <a:prstDash val="solid"/>
           </a:ln>
         </p:spPr>
+        <p:txBody>
+          <a:bodyPr/>
+          <a:p/>
+        </p:txBody>
       </p:sp>
       <p:sp>
         <p:nvSpPr>
@@ -28910,6 +29854,10 @@
             <a:prstDash val="solid"/>
           </a:ln>
         </p:spPr>
+        <p:txBody>
+          <a:bodyPr/>
+          <a:p/>
+        </p:txBody>
       </p:sp>
       <p:sp>
         <p:nvSpPr>
@@ -28979,6 +29927,10 @@
             <a:prstDash val="solid"/>
           </a:ln>
         </p:spPr>
+        <p:txBody>
+          <a:bodyPr/>
+          <a:p/>
+        </p:txBody>
       </p:sp>
       <p:sp>
         <p:nvSpPr>
@@ -29045,6 +29997,10 @@
             <a:prstDash val="solid"/>
           </a:ln>
         </p:spPr>
+        <p:txBody>
+          <a:bodyPr/>
+          <a:p/>
+        </p:txBody>
       </p:sp>
       <p:sp>
         <p:nvSpPr>
@@ -29111,6 +30067,10 @@
             <a:prstDash val="solid"/>
           </a:ln>
         </p:spPr>
+        <p:txBody>
+          <a:bodyPr/>
+          <a:p/>
+        </p:txBody>
       </p:sp>
       <p:sp>
         <p:nvSpPr>
@@ -29216,6 +30176,10 @@
             <a:prstDash val="solid"/>
           </a:ln>
         </p:spPr>
+        <p:txBody>
+          <a:bodyPr/>
+          <a:p/>
+        </p:txBody>
       </p:sp>
       <p:sp>
         <p:nvSpPr>
@@ -29321,6 +30285,10 @@
             <a:prstDash val="solid"/>
           </a:ln>
         </p:spPr>
+        <p:txBody>
+          <a:bodyPr/>
+          <a:p/>
+        </p:txBody>
       </p:sp>
       <p:sp>
         <p:nvSpPr>
@@ -29426,6 +30394,10 @@
             <a:prstDash val="solid"/>
           </a:ln>
         </p:spPr>
+        <p:txBody>
+          <a:bodyPr/>
+          <a:p/>
+        </p:txBody>
       </p:sp>
       <p:sp>
         <p:nvSpPr>
@@ -29673,6 +30645,10 @@
             <a:prstDash val="solid"/>
           </a:ln>
         </p:spPr>
+        <p:txBody>
+          <a:bodyPr/>
+          <a:p/>
+        </p:txBody>
       </p:sp>
       <p:sp>
         <p:nvSpPr>
@@ -29778,6 +30754,10 @@
             <a:prstDash val="solid"/>
           </a:ln>
         </p:spPr>
+        <p:txBody>
+          <a:bodyPr/>
+          <a:p/>
+        </p:txBody>
       </p:sp>
       <p:sp>
         <p:nvSpPr>
@@ -29883,6 +30863,10 @@
             <a:prstDash val="solid"/>
           </a:ln>
         </p:spPr>
+        <p:txBody>
+          <a:bodyPr/>
+          <a:p/>
+        </p:txBody>
       </p:sp>
       <p:sp>
         <p:nvSpPr>
@@ -29988,6 +30972,10 @@
             <a:prstDash val="solid"/>
           </a:ln>
         </p:spPr>
+        <p:txBody>
+          <a:bodyPr/>
+          <a:p/>
+        </p:txBody>
       </p:sp>
       <p:sp>
         <p:nvSpPr>
@@ -30054,6 +31042,10 @@
             <a:prstDash val="solid"/>
           </a:ln>
         </p:spPr>
+        <p:txBody>
+          <a:bodyPr/>
+          <a:p/>
+        </p:txBody>
       </p:sp>
       <p:sp>
         <p:nvSpPr>
@@ -30223,6 +31215,10 @@
             <a:prstDash val="solid"/>
           </a:ln>
         </p:spPr>
+        <p:txBody>
+          <a:bodyPr/>
+          <a:p/>
+        </p:txBody>
       </p:sp>
       <p:sp>
         <p:nvSpPr>
@@ -30250,6 +31246,10 @@
             <a:prstDash val="solid"/>
           </a:ln>
         </p:spPr>
+        <p:txBody>
+          <a:bodyPr/>
+          <a:p/>
+        </p:txBody>
       </p:sp>
       <p:sp>
         <p:nvSpPr>
@@ -30464,6 +31464,10 @@
             <a:prstDash val="solid"/>
           </a:ln>
         </p:spPr>
+        <p:txBody>
+          <a:bodyPr/>
+          <a:p/>
+        </p:txBody>
       </p:sp>
       <p:sp>
         <p:nvSpPr>
@@ -30491,6 +31495,10 @@
             <a:prstDash val="solid"/>
           </a:ln>
         </p:spPr>
+        <p:txBody>
+          <a:bodyPr/>
+          <a:p/>
+        </p:txBody>
       </p:sp>
       <p:sp>
         <p:nvSpPr>
@@ -30684,6 +31692,10 @@
             <a:prstDash val="solid"/>
           </a:ln>
         </p:spPr>
+        <p:txBody>
+          <a:bodyPr/>
+          <a:p/>
+        </p:txBody>
       </p:sp>
       <p:sp>
         <p:nvSpPr>
@@ -30750,6 +31762,10 @@
             <a:prstDash val="solid"/>
           </a:ln>
         </p:spPr>
+        <p:txBody>
+          <a:bodyPr/>
+          <a:p/>
+        </p:txBody>
       </p:sp>
       <p:sp>
         <p:nvSpPr>
@@ -30816,6 +31832,10 @@
             <a:prstDash val="solid"/>
           </a:ln>
         </p:spPr>
+        <p:txBody>
+          <a:bodyPr/>
+          <a:p/>
+        </p:txBody>
       </p:sp>
       <p:sp>
         <p:nvSpPr>
@@ -30882,6 +31902,10 @@
             <a:prstDash val="solid"/>
           </a:ln>
         </p:spPr>
+        <p:txBody>
+          <a:bodyPr/>
+          <a:p/>
+        </p:txBody>
       </p:sp>
       <p:sp>
         <p:nvSpPr>
